--- a/esports-ai/sports_ai_presentation.pptx
+++ b/esports-ai/sports_ai_presentation.pptx
@@ -112,20 +112,20 @@
   <p:extLst>
     <p:ext uri="{521415D9-36F7-43E2-AB2F-B90AF26B5E84}">
       <p14:sectionLst xmlns:p14="http://schemas.microsoft.com/office/powerpoint/2010/main">
-        <p14:section name="도입" id="{beb555ab-8f4c-b4ee-e18d-101e864f2917}">
+        <p14:section name="도입" id="{712cac1a-70d1-ce8d-5aa0-11d91f04b938}">
           <p14:sldIdLst>
             <p14:sldId id="256"/>
             <p14:sldId id="257"/>
             <p14:sldId id="258"/>
           </p14:sldIdLst>
         </p14:section>
-        <p14:section name="핵심" id="{40486ce5-b864-c305-bf26-37633a39d913}">
+        <p14:section name="핵심" id="{2ac247bd-cf18-c6b6-5a3e-4d15443c688c}">
           <p14:sldIdLst>
             <p14:sldId id="259"/>
             <p14:sldId id="260"/>
           </p14:sldIdLst>
         </p14:section>
-        <p14:section name="결론" id="{ec1fd861-5fe0-6944-21ab-564e204fa577}">
+        <p14:section name="결론" id="{50869f68-9ed7-8e13-30bb-4b3cec1b1301}">
           <p14:sldIdLst>
             <p14:sldId id="261"/>
           </p14:sldIdLst>
@@ -714,7 +714,7 @@
             <a:r>
               <a:rPr lang="en-US" dirty="0"/>
               <a:t>사실 기계가 사람을 이긴 것은 오래된 일입니다. 자동차는 볼트보다 빠르고, 지게차는 역도 선수보다 무거운 것을 듭니다.
-e스포츠에서도 2019년에 AI가 프로 팀을 이겼습니다. 하지만 2024년 롤드컵 결승은 약 690만 명이 동시에 봤습니다.
+e스포츠에서도 2019년에 AI가 프로 팀을 이겼습니다. 하지만 2024년 롤드컵 결승에서 페이커 선수의 경기를 약 690만 명이 동시에 봤습니다. 잠실야구장 약 290개를 꽉 채우는 숫자입니다.
 기계가 더 잘해도, 우리는 여전히 사람의 경기를 봅니다.</a:t>
             </a:r>
             <a:endParaRPr lang="en-US" dirty="0"/>
@@ -3438,7 +3438,21 @@
                   <a:schemeClr val="bg1"/>
                 </a:solidFill>
               </a:rPr>
-              <a:t>그래도 2024 롤드컵 결승은 690만 명이 봤다</a:t>
+              <a:t>그래도 페이커의 결승전을 690만 명이 봤다</a:t>
+            </a:r>
+            <a:endParaRPr lang="en-US" sz="1400" dirty="0"/>
+          </a:p>
+          <a:p>
+            <a:pPr indent="0" marL="0">
+              <a:buNone/>
+            </a:pPr>
+            <a:r>
+              <a:rPr lang="en-US" sz="1200" b="1" dirty="0">
+                <a:solidFill>
+                  <a:schemeClr val="accent1"/>
+                </a:solidFill>
+              </a:rPr>
+              <a:t>= 잠실야구장 약 290개를 꽉 채우는 인원</a:t>
             </a:r>
             <a:endParaRPr lang="en-US" sz="1400" dirty="0"/>
           </a:p>
@@ -3474,7 +3488,7 @@
                   <a:schemeClr val="bg2"/>
                 </a:solidFill>
               </a:rPr>
-              <a:t>※ 690만 명: 2024 롤드컵 결승 최고 동시 시청자 (중국 플랫폼 제외)</a:t>
+              <a:t>※ 690만 명: 2024 롤드컵 결승(T1 vs BLG) 최고 동시 시청자, 중국 플랫폼 제외 / 잠실야구장 약 2만 4천 석 기준</a:t>
             </a:r>
             <a:endParaRPr lang="en-US" sz="1000" dirty="0"/>
           </a:p>

--- a/esports-ai/sports_ai_presentation.pptx
+++ b/esports-ai/sports_ai_presentation.pptx
@@ -112,20 +112,20 @@
   <p:extLst>
     <p:ext uri="{521415D9-36F7-43E2-AB2F-B90AF26B5E84}">
       <p14:sectionLst xmlns:p14="http://schemas.microsoft.com/office/powerpoint/2010/main">
-        <p14:section name="도입" id="{712cac1a-70d1-ce8d-5aa0-11d91f04b938}">
+        <p14:section name="도입" id="{0260d43f-6bee-f850-2627-82115b0d07e6}">
           <p14:sldIdLst>
             <p14:sldId id="256"/>
             <p14:sldId id="257"/>
             <p14:sldId id="258"/>
           </p14:sldIdLst>
         </p14:section>
-        <p14:section name="핵심" id="{2ac247bd-cf18-c6b6-5a3e-4d15443c688c}">
+        <p14:section name="핵심" id="{7c1a0511-9941-a1d5-4abf-4ce79618796c}">
           <p14:sldIdLst>
             <p14:sldId id="259"/>
             <p14:sldId id="260"/>
           </p14:sldIdLst>
         </p14:section>
-        <p14:section name="결론" id="{50869f68-9ed7-8e13-30bb-4b3cec1b1301}">
+        <p14:section name="결론" id="{37c4ba49-ae59-565b-126f-2e9c082fc361}">
           <p14:sldIdLst>
             <p14:sldId id="261"/>
           </p14:sldIdLst>
@@ -714,7 +714,7 @@
             <a:r>
               <a:rPr lang="en-US" dirty="0"/>
               <a:t>사실 기계가 사람을 이긴 것은 오래된 일입니다. 자동차는 볼트보다 빠르고, 지게차는 역도 선수보다 무거운 것을 듭니다.
-e스포츠에서도 2019년에 AI가 프로 팀을 이겼습니다. 하지만 2024년 롤드컵 결승에서 페이커 선수의 경기를 약 690만 명이 동시에 봤습니다. 잠실야구장 약 290개를 꽉 채우는 숫자입니다.
+피칭 머신은 투수보다 빠른 공을 지치지 않고 던집니다. 그래도 우리는 투수가 던지는 공 하나에 숨을 죽입니다.
 기계가 더 잘해도, 우리는 여전히 사람의 경기를 봅니다.</a:t>
             </a:r>
             <a:endParaRPr lang="en-US" dirty="0"/>
@@ -3287,7 +3287,7 @@
                   <a:schemeClr val="bg1"/>
                 </a:solidFill>
               </a:rPr>
-              <a:t>AI가 프로 팀을 이겼다 (2019)</a:t>
+              <a:t>피칭 머신이 더 빠르게 던진다</a:t>
             </a:r>
             <a:endParaRPr lang="en-US" sz="1300" dirty="0"/>
           </a:p>
@@ -3438,59 +3438,9 @@
                   <a:schemeClr val="bg1"/>
                 </a:solidFill>
               </a:rPr>
-              <a:t>그래도 페이커의 결승전을 690만 명이 봤다</a:t>
+              <a:t>그래도 투수가 던지는 공 하나에 숨을 죽인다</a:t>
             </a:r>
             <a:endParaRPr lang="en-US" sz="1400" dirty="0"/>
-          </a:p>
-          <a:p>
-            <a:pPr indent="0" marL="0">
-              <a:buNone/>
-            </a:pPr>
-            <a:r>
-              <a:rPr lang="en-US" sz="1200" b="1" dirty="0">
-                <a:solidFill>
-                  <a:schemeClr val="accent1"/>
-                </a:solidFill>
-              </a:rPr>
-              <a:t>= 잠실야구장 약 290개를 꽉 채우는 인원</a:t>
-            </a:r>
-            <a:endParaRPr lang="en-US" sz="1400" dirty="0"/>
-          </a:p>
-        </p:txBody>
-      </p:sp>
-      <p:sp>
-        <p:nvSpPr>
-          <p:cNvPr id="33" name="footnote"/>
-          <p:cNvSpPr txBox="1"/>
-          <p:nvPr/>
-        </p:nvSpPr>
-        <p:spPr>
-          <a:xfrm>
-            <a:off x="457200" y="4251960"/>
-            <a:ext cx="8229600" cy="274320"/>
-          </a:xfrm>
-          <a:prstGeom prst="rect">
-            <a:avLst/>
-          </a:prstGeom>
-          <a:noFill/>
-          <a:ln/>
-        </p:spPr>
-        <p:txBody>
-          <a:bodyPr wrap="square" lIns="0" tIns="0" rIns="0" bIns="0" rtlCol="0" anchor="ctr"/>
-          <a:lstStyle/>
-          <a:p>
-            <a:pPr indent="0" marL="0">
-              <a:buNone/>
-            </a:pPr>
-            <a:r>
-              <a:rPr lang="en-US" sz="1000" dirty="0">
-                <a:solidFill>
-                  <a:schemeClr val="bg2"/>
-                </a:solidFill>
-              </a:rPr>
-              <a:t>※ 690만 명: 2024 롤드컵 결승(T1 vs BLG) 최고 동시 시청자, 중국 플랫폼 제외 / 잠실야구장 약 2만 4천 석 기준</a:t>
-            </a:r>
-            <a:endParaRPr lang="en-US" sz="1000" dirty="0"/>
           </a:p>
         </p:txBody>
       </p:sp>
